--- a/deliverables/03_SWOT_Satisfaction_Client.pptx
+++ b/deliverables/03_SWOT_Satisfaction_Client.pptx
@@ -1038,958 +1038,958 @@
 </file>
 
 <file path=ppt/slides/slide1.xml><?xml version="1.0" encoding="utf-8"?>
-<p:sld xmlns:p="http://schemas.openxmlformats.org/presentationml/2006/main">
-  <p:cSld>
-    <p:bg>
-      <p:bgPr>
-        <a:solidFill xmlns:a="http://schemas.openxmlformats.org/drawingml/2006/main">
-          <a:srgbClr val="FFFFFF"/>
-        </a:solidFill>
-      </p:bgPr>
-    </p:bg>
-    <p:spTree>
-      <p:nvGrpSpPr>
-        <p:cNvPr id="1" name=""/>
-        <p:cNvGrpSpPr/>
-        <p:nvPr/>
-      </p:nvGrpSpPr>
-      <p:grpSpPr>
-        <a:xfrm xmlns:a="http://schemas.openxmlformats.org/drawingml/2006/main"/>
-      </p:grpSpPr>
-      <p:sp>
-        <p:nvSpPr>
-          <p:cNvPr id="19" name="">
-            <a:extLst xmlns:a="http://schemas.openxmlformats.org/drawingml/2006/main">
-              <a:ext uri="{FF2B5EF4-FFF2-40B4-BE49-F238E27FC236}">
-                <a16:creationId xmlns:a16="http://schemas.microsoft.com/office/drawing/2014/main" id="{192F4900-4145-4DC9-A4A2-F467D3A9281F}"/>
-              </a:ext>
-            </a:extLst>
-          </p:cNvPr>
-          <p:cNvSpPr>
-            <a:spLocks xmlns:a="http://schemas.openxmlformats.org/drawingml/2006/main" noGrp="1"/>
-          </p:cNvSpPr>
-          <p:nvPr/>
-        </p:nvSpPr>
-        <p:spPr>
-          <a:xfrm xmlns:a="http://schemas.openxmlformats.org/drawingml/2006/main">
-            <a:off x="590550" y="295275"/>
-            <a:ext cx="10953750" cy="552450"/>
-          </a:xfrm>
-          <a:prstGeom xmlns:a="http://schemas.openxmlformats.org/drawingml/2006/main" prst="rect">
-            <a:avLst/>
-          </a:prstGeom>
-          <a:noFill xmlns:a="http://schemas.openxmlformats.org/drawingml/2006/main"/>
-          <a:ln xmlns:a="http://schemas.openxmlformats.org/drawingml/2006/main" w="0">
-            <a:noFill/>
-          </a:ln>
-        </p:spPr>
-        <p:txBody>
-          <a:bodyPr xmlns:a="http://schemas.openxmlformats.org/drawingml/2006/main" anchor="ctr">
-            <a:noAutofit/>
-          </a:bodyPr>
-          <a:lstStyle xmlns:a="http://schemas.openxmlformats.org/drawingml/2006/main"/>
-          <a:p xmlns:a="http://schemas.openxmlformats.org/drawingml/2006/main">
-            <a:pPr>
-              <a:defRPr sz="3000" b="1">
-                <a:solidFill>
-                  <a:srgbClr val="142637"/>
-                </a:solidFill>
-                <a:latin typeface="Arial"/>
-                <a:ea typeface="Arial"/>
-                <a:cs typeface="Arial"/>
-              </a:defRPr>
-            </a:pPr>
-            <a:r>
-              <a:rPr sz="3000" b="1">
-                <a:solidFill>
-                  <a:srgbClr val="142637"/>
-                </a:solidFill>
-                <a:latin typeface="Arial"/>
-                <a:ea typeface="Arial"/>
-                <a:cs typeface="Arial"/>
-              </a:rPr>
-              <a:t>SWOT du projet Satisfaction Client</a:t>
-            </a:r>
-          </a:p>
-        </p:txBody>
-      </p:sp>
-      <p:sp>
-        <p:nvSpPr>
-          <p:cNvPr id="2" name="">
-            <a:extLst xmlns:a="http://schemas.openxmlformats.org/drawingml/2006/main">
-              <a:ext uri="{FF2B5EF4-FFF2-40B4-BE49-F238E27FC236}">
-                <a16:creationId xmlns:a16="http://schemas.microsoft.com/office/drawing/2014/main" id="{975DC075-AB7F-4535-A51C-FB12E0A04158}"/>
-              </a:ext>
-            </a:extLst>
-          </p:cNvPr>
-          <p:cNvSpPr>
-            <a:spLocks xmlns:a="http://schemas.openxmlformats.org/drawingml/2006/main" noGrp="1"/>
-          </p:cNvSpPr>
-          <p:nvPr/>
-        </p:nvSpPr>
-        <p:spPr>
-          <a:xfrm xmlns:a="http://schemas.openxmlformats.org/drawingml/2006/main">
-            <a:off x="600075" y="866775"/>
-            <a:ext cx="10953750" cy="266700"/>
-          </a:xfrm>
-          <a:prstGeom xmlns:a="http://schemas.openxmlformats.org/drawingml/2006/main" prst="rect">
-            <a:avLst/>
-          </a:prstGeom>
-          <a:noFill xmlns:a="http://schemas.openxmlformats.org/drawingml/2006/main"/>
-          <a:ln xmlns:a="http://schemas.openxmlformats.org/drawingml/2006/main" w="0">
-            <a:noFill/>
-          </a:ln>
-        </p:spPr>
-        <p:txBody>
-          <a:bodyPr xmlns:a="http://schemas.openxmlformats.org/drawingml/2006/main" anchor="ctr">
-            <a:noAutofit/>
-          </a:bodyPr>
-          <a:lstStyle xmlns:a="http://schemas.openxmlformats.org/drawingml/2006/main"/>
-          <a:p xmlns:a="http://schemas.openxmlformats.org/drawingml/2006/main">
-            <a:pPr>
-              <a:defRPr sz="1350" b="0">
-                <a:solidFill>
-                  <a:srgbClr val="536171"/>
-                </a:solidFill>
-                <a:latin typeface="Arial"/>
-                <a:ea typeface="Arial"/>
-                <a:cs typeface="Arial"/>
-              </a:defRPr>
-            </a:pPr>
-            <a:r>
-              <a:rPr sz="1350" b="0">
-                <a:solidFill>
-                  <a:srgbClr val="536171"/>
-                </a:solidFill>
-                <a:latin typeface="Arial"/>
-                <a:ea typeface="Arial"/>
-                <a:cs typeface="Arial"/>
-              </a:rPr>
-              <a:t>État au 22 septembre 2026  |  Hypothèses et limites de soutenance</a:t>
-            </a:r>
-          </a:p>
-        </p:txBody>
-      </p:sp>
-      <p:sp>
-        <p:nvSpPr>
-          <p:cNvPr id="3" name="">
-            <a:extLst xmlns:a="http://schemas.openxmlformats.org/drawingml/2006/main">
-              <a:ext uri="{FF2B5EF4-FFF2-40B4-BE49-F238E27FC236}">
-                <a16:creationId xmlns:a16="http://schemas.microsoft.com/office/drawing/2014/main" id="{DCE24DC1-D5EA-4FB7-853B-BDC3C2F262D5}"/>
-              </a:ext>
-            </a:extLst>
-          </p:cNvPr>
-          <p:cNvSpPr>
-            <a:spLocks xmlns:a="http://schemas.openxmlformats.org/drawingml/2006/main" noGrp="1"/>
-          </p:cNvSpPr>
-          <p:nvPr/>
-        </p:nvSpPr>
-        <p:spPr>
-          <a:xfrm xmlns:a="http://schemas.openxmlformats.org/drawingml/2006/main">
-            <a:off x="590550" y="1428750"/>
-            <a:ext cx="5391150" cy="2228850"/>
-          </a:xfrm>
-          <a:prstGeom xmlns:a="http://schemas.openxmlformats.org/drawingml/2006/main" prst="rect">
-            <a:avLst/>
-          </a:prstGeom>
-          <a:solidFill xmlns:a="http://schemas.openxmlformats.org/drawingml/2006/main">
-            <a:srgbClr val="EFF5F8"/>
-          </a:solidFill>
-          <a:ln xmlns:a="http://schemas.openxmlformats.org/drawingml/2006/main" w="9525">
-            <a:solidFill>
-              <a:srgbClr val="B4CBD9"/>
-            </a:solidFill>
-          </a:ln>
-        </p:spPr>
-      </p:sp>
-      <p:sp>
-        <p:nvSpPr>
-          <p:cNvPr id="4" name="">
-            <a:extLst xmlns:a="http://schemas.openxmlformats.org/drawingml/2006/main">
-              <a:ext uri="{FF2B5EF4-FFF2-40B4-BE49-F238E27FC236}">
-                <a16:creationId xmlns:a16="http://schemas.microsoft.com/office/drawing/2014/main" id="{3F1A93D4-4E10-42CE-9E07-E1BF288C0B37}"/>
-              </a:ext>
-            </a:extLst>
-          </p:cNvPr>
-          <p:cNvSpPr>
-            <a:spLocks xmlns:a="http://schemas.openxmlformats.org/drawingml/2006/main" noGrp="1"/>
-          </p:cNvSpPr>
-          <p:nvPr/>
-        </p:nvSpPr>
-        <p:spPr>
-          <a:xfrm xmlns:a="http://schemas.openxmlformats.org/drawingml/2006/main">
-            <a:off x="819150" y="1600200"/>
-            <a:ext cx="4953000" cy="304800"/>
-          </a:xfrm>
-          <a:prstGeom xmlns:a="http://schemas.openxmlformats.org/drawingml/2006/main" prst="rect">
-            <a:avLst/>
-          </a:prstGeom>
-          <a:noFill xmlns:a="http://schemas.openxmlformats.org/drawingml/2006/main"/>
-          <a:ln xmlns:a="http://schemas.openxmlformats.org/drawingml/2006/main" w="0">
-            <a:noFill/>
-          </a:ln>
-        </p:spPr>
-        <p:txBody>
-          <a:bodyPr xmlns:a="http://schemas.openxmlformats.org/drawingml/2006/main" anchor="ctr">
-            <a:noAutofit/>
-          </a:bodyPr>
-          <a:lstStyle xmlns:a="http://schemas.openxmlformats.org/drawingml/2006/main"/>
-          <a:p xmlns:a="http://schemas.openxmlformats.org/drawingml/2006/main">
-            <a:pPr>
-              <a:defRPr sz="1725" b="1">
-                <a:solidFill>
-                  <a:srgbClr val="155A81"/>
-                </a:solidFill>
-                <a:latin typeface="Arial"/>
-                <a:ea typeface="Arial"/>
-                <a:cs typeface="Arial"/>
-              </a:defRPr>
-            </a:pPr>
-            <a:r>
-              <a:rPr sz="1725" b="1">
-                <a:solidFill>
-                  <a:srgbClr val="155A81"/>
-                </a:solidFill>
-                <a:latin typeface="Arial"/>
-                <a:ea typeface="Arial"/>
-                <a:cs typeface="Arial"/>
-              </a:rPr>
-              <a:t>FORCES</a:t>
-            </a:r>
-          </a:p>
-        </p:txBody>
-      </p:sp>
-      <p:sp>
-        <p:nvSpPr>
-          <p:cNvPr id="5" name="">
-            <a:extLst xmlns:a="http://schemas.openxmlformats.org/drawingml/2006/main">
-              <a:ext uri="{FF2B5EF4-FFF2-40B4-BE49-F238E27FC236}">
-                <a16:creationId xmlns:a16="http://schemas.microsoft.com/office/drawing/2014/main" id="{16040025-5152-40AD-873D-EB89826778F0}"/>
-              </a:ext>
-            </a:extLst>
-          </p:cNvPr>
-          <p:cNvSpPr>
-            <a:spLocks xmlns:a="http://schemas.openxmlformats.org/drawingml/2006/main" noGrp="1"/>
-          </p:cNvSpPr>
-          <p:nvPr/>
-        </p:nvSpPr>
-        <p:spPr>
-          <a:xfrm xmlns:a="http://schemas.openxmlformats.org/drawingml/2006/main">
-            <a:off x="819150" y="2076450"/>
-            <a:ext cx="4905375" cy="552450"/>
-          </a:xfrm>
-          <a:prstGeom xmlns:a="http://schemas.openxmlformats.org/drawingml/2006/main" prst="rect">
-            <a:avLst/>
-          </a:prstGeom>
-          <a:noFill xmlns:a="http://schemas.openxmlformats.org/drawingml/2006/main"/>
-          <a:ln xmlns:a="http://schemas.openxmlformats.org/drawingml/2006/main" w="0">
-            <a:noFill/>
-          </a:ln>
-        </p:spPr>
-        <p:txBody>
-          <a:bodyPr xmlns:a="http://schemas.openxmlformats.org/drawingml/2006/main" anchor="ctr">
-            <a:noAutofit/>
-          </a:bodyPr>
-          <a:lstStyle xmlns:a="http://schemas.openxmlformats.org/drawingml/2006/main"/>
-          <a:p xmlns:a="http://schemas.openxmlformats.org/drawingml/2006/main">
-            <a:pPr>
-              <a:defRPr sz="1463" b="0">
-                <a:solidFill>
-                  <a:srgbClr val="142637"/>
-                </a:solidFill>
-                <a:latin typeface="Arial"/>
-                <a:ea typeface="Arial"/>
-                <a:cs typeface="Arial"/>
-              </a:defRPr>
-            </a:pPr>
-            <a:r>
-              <a:rPr sz="1463" b="0">
-                <a:solidFill>
-                  <a:srgbClr val="142637"/>
-                </a:solidFill>
-                <a:latin typeface="Arial"/>
-                <a:ea typeface="Arial"/>
-                <a:cs typeface="Arial"/>
-              </a:rPr>
-              <a:t>• Import, analyse et tableau de bord ; JWT et rôles.</a:t>
-            </a:r>
-          </a:p>
-        </p:txBody>
-      </p:sp>
-      <p:sp>
-        <p:nvSpPr>
-          <p:cNvPr id="6" name="">
-            <a:extLst xmlns:a="http://schemas.openxmlformats.org/drawingml/2006/main">
-              <a:ext uri="{FF2B5EF4-FFF2-40B4-BE49-F238E27FC236}">
-                <a16:creationId xmlns:a16="http://schemas.microsoft.com/office/drawing/2014/main" id="{144C0C40-8899-463A-9837-56AC8D9CB4EC}"/>
-              </a:ext>
-            </a:extLst>
-          </p:cNvPr>
-          <p:cNvSpPr>
-            <a:spLocks xmlns:a="http://schemas.openxmlformats.org/drawingml/2006/main" noGrp="1"/>
-          </p:cNvSpPr>
-          <p:nvPr/>
-        </p:nvSpPr>
-        <p:spPr>
-          <a:xfrm xmlns:a="http://schemas.openxmlformats.org/drawingml/2006/main">
-            <a:off x="819150" y="2733675"/>
-            <a:ext cx="4905375" cy="685800"/>
-          </a:xfrm>
-          <a:prstGeom xmlns:a="http://schemas.openxmlformats.org/drawingml/2006/main" prst="rect">
-            <a:avLst/>
-          </a:prstGeom>
-          <a:noFill xmlns:a="http://schemas.openxmlformats.org/drawingml/2006/main"/>
-          <a:ln xmlns:a="http://schemas.openxmlformats.org/drawingml/2006/main" w="0">
-            <a:noFill/>
-          </a:ln>
-        </p:spPr>
-        <p:txBody>
-          <a:bodyPr xmlns:a="http://schemas.openxmlformats.org/drawingml/2006/main" anchor="ctr">
-            <a:noAutofit/>
-          </a:bodyPr>
-          <a:lstStyle xmlns:a="http://schemas.openxmlformats.org/drawingml/2006/main"/>
-          <a:p xmlns:a="http://schemas.openxmlformats.org/drawingml/2006/main">
-            <a:pPr>
-              <a:defRPr sz="1463" b="0">
-                <a:solidFill>
-                  <a:srgbClr val="142637"/>
-                </a:solidFill>
-                <a:latin typeface="Arial"/>
-                <a:ea typeface="Arial"/>
-                <a:cs typeface="Arial"/>
-              </a:defRPr>
-            </a:pPr>
-            <a:r>
-              <a:rPr sz="1463" b="0">
-                <a:solidFill>
-                  <a:srgbClr val="142637"/>
-                </a:solidFill>
-                <a:latin typeface="Arial"/>
-                <a:ea typeface="Arial"/>
-                <a:cs typeface="Arial"/>
-              </a:rPr>
-              <a:t>• ML dédupliqué ; v53 documenté et identifiable dans MLflow conservé. Déploiement et supervision de test.</a:t>
-            </a:r>
-          </a:p>
-        </p:txBody>
-      </p:sp>
-      <p:sp>
-        <p:nvSpPr>
-          <p:cNvPr id="7" name="">
-            <a:extLst xmlns:a="http://schemas.openxmlformats.org/drawingml/2006/main">
-              <a:ext uri="{FF2B5EF4-FFF2-40B4-BE49-F238E27FC236}">
-                <a16:creationId xmlns:a16="http://schemas.microsoft.com/office/drawing/2014/main" id="{96FA16C6-7686-4F2E-8C57-832F7A73251C}"/>
-              </a:ext>
-            </a:extLst>
-          </p:cNvPr>
-          <p:cNvSpPr>
-            <a:spLocks xmlns:a="http://schemas.openxmlformats.org/drawingml/2006/main" noGrp="1"/>
-          </p:cNvSpPr>
-          <p:nvPr/>
-        </p:nvSpPr>
-        <p:spPr>
-          <a:xfrm xmlns:a="http://schemas.openxmlformats.org/drawingml/2006/main">
-            <a:off x="6191250" y="1428750"/>
-            <a:ext cx="5391150" cy="2228850"/>
-          </a:xfrm>
-          <a:prstGeom xmlns:a="http://schemas.openxmlformats.org/drawingml/2006/main" prst="rect">
-            <a:avLst/>
-          </a:prstGeom>
-          <a:solidFill xmlns:a="http://schemas.openxmlformats.org/drawingml/2006/main">
-            <a:srgbClr val="F8F2F0"/>
-          </a:solidFill>
-          <a:ln xmlns:a="http://schemas.openxmlformats.org/drawingml/2006/main" w="9525">
-            <a:solidFill>
-              <a:srgbClr val="D9C4BE"/>
-            </a:solidFill>
-          </a:ln>
-        </p:spPr>
-      </p:sp>
-      <p:sp>
-        <p:nvSpPr>
-          <p:cNvPr id="8" name="">
-            <a:extLst xmlns:a="http://schemas.openxmlformats.org/drawingml/2006/main">
-              <a:ext uri="{FF2B5EF4-FFF2-40B4-BE49-F238E27FC236}">
-                <a16:creationId xmlns:a16="http://schemas.microsoft.com/office/drawing/2014/main" id="{D5230432-5A08-4570-98BB-B5E57C7CED4A}"/>
-              </a:ext>
-            </a:extLst>
-          </p:cNvPr>
-          <p:cNvSpPr>
-            <a:spLocks xmlns:a="http://schemas.openxmlformats.org/drawingml/2006/main" noGrp="1"/>
-          </p:cNvSpPr>
-          <p:nvPr/>
-        </p:nvSpPr>
-        <p:spPr>
-          <a:xfrm xmlns:a="http://schemas.openxmlformats.org/drawingml/2006/main">
-            <a:off x="6419850" y="1600200"/>
-            <a:ext cx="4953000" cy="304800"/>
-          </a:xfrm>
-          <a:prstGeom xmlns:a="http://schemas.openxmlformats.org/drawingml/2006/main" prst="rect">
-            <a:avLst/>
-          </a:prstGeom>
-          <a:noFill xmlns:a="http://schemas.openxmlformats.org/drawingml/2006/main"/>
-          <a:ln xmlns:a="http://schemas.openxmlformats.org/drawingml/2006/main" w="0">
-            <a:noFill/>
-          </a:ln>
-        </p:spPr>
-        <p:txBody>
-          <a:bodyPr xmlns:a="http://schemas.openxmlformats.org/drawingml/2006/main" anchor="ctr">
-            <a:noAutofit/>
-          </a:bodyPr>
-          <a:lstStyle xmlns:a="http://schemas.openxmlformats.org/drawingml/2006/main"/>
-          <a:p xmlns:a="http://schemas.openxmlformats.org/drawingml/2006/main">
-            <a:pPr>
-              <a:defRPr sz="1725" b="1">
-                <a:solidFill>
-                  <a:srgbClr val="155A81"/>
-                </a:solidFill>
-                <a:latin typeface="Arial"/>
-                <a:ea typeface="Arial"/>
-                <a:cs typeface="Arial"/>
-              </a:defRPr>
-            </a:pPr>
-            <a:r>
-              <a:rPr sz="1725" b="1">
-                <a:solidFill>
-                  <a:srgbClr val="155A81"/>
-                </a:solidFill>
-                <a:latin typeface="Arial"/>
-                <a:ea typeface="Arial"/>
-                <a:cs typeface="Arial"/>
-              </a:rPr>
-              <a:t>FAIBLESSES</a:t>
-            </a:r>
-          </a:p>
-        </p:txBody>
-      </p:sp>
-      <p:sp>
-        <p:nvSpPr>
-          <p:cNvPr id="9" name="">
-            <a:extLst xmlns:a="http://schemas.openxmlformats.org/drawingml/2006/main">
-              <a:ext uri="{FF2B5EF4-FFF2-40B4-BE49-F238E27FC236}">
-                <a16:creationId xmlns:a16="http://schemas.microsoft.com/office/drawing/2014/main" id="{69926761-B265-4B47-A302-5545BA0B28F0}"/>
-              </a:ext>
-            </a:extLst>
-          </p:cNvPr>
-          <p:cNvSpPr>
-            <a:spLocks xmlns:a="http://schemas.openxmlformats.org/drawingml/2006/main" noGrp="1"/>
-          </p:cNvSpPr>
-          <p:nvPr/>
-        </p:nvSpPr>
-        <p:spPr>
-          <a:xfrm xmlns:a="http://schemas.openxmlformats.org/drawingml/2006/main">
-            <a:off x="6419850" y="2076450"/>
-            <a:ext cx="4905375" cy="552450"/>
-          </a:xfrm>
-          <a:prstGeom xmlns:a="http://schemas.openxmlformats.org/drawingml/2006/main" prst="rect">
-            <a:avLst/>
-          </a:prstGeom>
-          <a:noFill xmlns:a="http://schemas.openxmlformats.org/drawingml/2006/main"/>
-          <a:ln xmlns:a="http://schemas.openxmlformats.org/drawingml/2006/main" w="0">
-            <a:noFill/>
-          </a:ln>
-        </p:spPr>
-        <p:txBody>
-          <a:bodyPr xmlns:a="http://schemas.openxmlformats.org/drawingml/2006/main" anchor="ctr">
-            <a:noAutofit/>
-          </a:bodyPr>
-          <a:lstStyle xmlns:a="http://schemas.openxmlformats.org/drawingml/2006/main"/>
-          <a:p xmlns:a="http://schemas.openxmlformats.org/drawingml/2006/main">
-            <a:pPr>
-              <a:defRPr sz="1463" b="0">
-                <a:solidFill>
-                  <a:srgbClr val="142637"/>
-                </a:solidFill>
-                <a:latin typeface="Arial"/>
-                <a:ea typeface="Arial"/>
-                <a:cs typeface="Arial"/>
-              </a:defRPr>
-            </a:pPr>
-            <a:r>
-              <a:rPr sz="1463" b="0">
-                <a:solidFill>
-                  <a:srgbClr val="142637"/>
-                </a:solidFill>
-                <a:latin typeface="Arial"/>
-                <a:ea typeface="Arial"/>
-                <a:cs typeface="Arial"/>
-              </a:rPr>
-              <a:t>• HTTP 403 : collecte exhaustive &gt;10 000 avis non démontrée.</a:t>
-            </a:r>
-          </a:p>
-        </p:txBody>
-      </p:sp>
-      <p:sp>
-        <p:nvSpPr>
-          <p:cNvPr id="10" name="">
-            <a:extLst xmlns:a="http://schemas.openxmlformats.org/drawingml/2006/main">
-              <a:ext uri="{FF2B5EF4-FFF2-40B4-BE49-F238E27FC236}">
-                <a16:creationId xmlns:a16="http://schemas.microsoft.com/office/drawing/2014/main" id="{C22A82BA-5E27-469D-A0E4-1BC46926196D}"/>
-              </a:ext>
-            </a:extLst>
-          </p:cNvPr>
-          <p:cNvSpPr>
-            <a:spLocks xmlns:a="http://schemas.openxmlformats.org/drawingml/2006/main" noGrp="1"/>
-          </p:cNvSpPr>
-          <p:nvPr/>
-        </p:nvSpPr>
-        <p:spPr>
-          <a:xfrm xmlns:a="http://schemas.openxmlformats.org/drawingml/2006/main">
-            <a:off x="6419850" y="2733675"/>
-            <a:ext cx="4905375" cy="685800"/>
-          </a:xfrm>
-          <a:prstGeom xmlns:a="http://schemas.openxmlformats.org/drawingml/2006/main" prst="rect">
-            <a:avLst/>
-          </a:prstGeom>
-          <a:noFill xmlns:a="http://schemas.openxmlformats.org/drawingml/2006/main"/>
-          <a:ln xmlns:a="http://schemas.openxmlformats.org/drawingml/2006/main" w="0">
-            <a:noFill/>
-          </a:ln>
-        </p:spPr>
-        <p:txBody>
-          <a:bodyPr xmlns:a="http://schemas.openxmlformats.org/drawingml/2006/main" anchor="ctr">
-            <a:noAutofit/>
-          </a:bodyPr>
-          <a:lstStyle xmlns:a="http://schemas.openxmlformats.org/drawingml/2006/main"/>
-          <a:p xmlns:a="http://schemas.openxmlformats.org/drawingml/2006/main">
-            <a:pPr>
-              <a:defRPr sz="1463" b="0">
-                <a:solidFill>
-                  <a:srgbClr val="142637"/>
-                </a:solidFill>
-                <a:latin typeface="Arial"/>
-                <a:ea typeface="Arial"/>
-                <a:cs typeface="Arial"/>
-              </a:defRPr>
-            </a:pPr>
-            <a:r>
-              <a:rPr sz="1463" b="0">
-                <a:solidFill>
-                  <a:srgbClr val="142637"/>
-                </a:solidFill>
-                <a:latin typeface="Arial"/>
-                <a:ea typeface="Arial"/>
-                <a:cs typeface="Arial"/>
-              </a:rPr>
-              <a:t>• Corpus et classe Neutre limités ; accessibilité et RGPD non audités de bout en bout.</a:t>
-            </a:r>
-          </a:p>
-        </p:txBody>
-      </p:sp>
-      <p:sp>
-        <p:nvSpPr>
-          <p:cNvPr id="11" name="">
-            <a:extLst xmlns:a="http://schemas.openxmlformats.org/drawingml/2006/main">
-              <a:ext uri="{FF2B5EF4-FFF2-40B4-BE49-F238E27FC236}">
-                <a16:creationId xmlns:a16="http://schemas.microsoft.com/office/drawing/2014/main" id="{FB67ACA6-9768-4490-9FEA-2A3D543FED4D}"/>
-              </a:ext>
-            </a:extLst>
-          </p:cNvPr>
-          <p:cNvSpPr>
-            <a:spLocks xmlns:a="http://schemas.openxmlformats.org/drawingml/2006/main" noGrp="1"/>
-          </p:cNvSpPr>
-          <p:nvPr/>
-        </p:nvSpPr>
-        <p:spPr>
-          <a:xfrm xmlns:a="http://schemas.openxmlformats.org/drawingml/2006/main">
-            <a:off x="590550" y="3924300"/>
-            <a:ext cx="5391150" cy="2228850"/>
-          </a:xfrm>
-          <a:prstGeom xmlns:a="http://schemas.openxmlformats.org/drawingml/2006/main" prst="rect">
-            <a:avLst/>
-          </a:prstGeom>
-          <a:solidFill xmlns:a="http://schemas.openxmlformats.org/drawingml/2006/main">
-            <a:srgbClr val="F1F5F0"/>
-          </a:solidFill>
-          <a:ln xmlns:a="http://schemas.openxmlformats.org/drawingml/2006/main" w="9525">
-            <a:solidFill>
-              <a:srgbClr val="C2D3BD"/>
-            </a:solidFill>
-          </a:ln>
-        </p:spPr>
-      </p:sp>
-      <p:sp>
-        <p:nvSpPr>
-          <p:cNvPr id="12" name="">
-            <a:extLst xmlns:a="http://schemas.openxmlformats.org/drawingml/2006/main">
-              <a:ext uri="{FF2B5EF4-FFF2-40B4-BE49-F238E27FC236}">
-                <a16:creationId xmlns:a16="http://schemas.microsoft.com/office/drawing/2014/main" id="{1850CD80-5E2B-4F5E-81E4-CE1FD538BADF}"/>
-              </a:ext>
-            </a:extLst>
-          </p:cNvPr>
-          <p:cNvSpPr>
-            <a:spLocks xmlns:a="http://schemas.openxmlformats.org/drawingml/2006/main" noGrp="1"/>
-          </p:cNvSpPr>
-          <p:nvPr/>
-        </p:nvSpPr>
-        <p:spPr>
-          <a:xfrm xmlns:a="http://schemas.openxmlformats.org/drawingml/2006/main">
-            <a:off x="819150" y="4095750"/>
-            <a:ext cx="4953000" cy="304800"/>
-          </a:xfrm>
-          <a:prstGeom xmlns:a="http://schemas.openxmlformats.org/drawingml/2006/main" prst="rect">
-            <a:avLst/>
-          </a:prstGeom>
-          <a:noFill xmlns:a="http://schemas.openxmlformats.org/drawingml/2006/main"/>
-          <a:ln xmlns:a="http://schemas.openxmlformats.org/drawingml/2006/main" w="0">
-            <a:noFill/>
-          </a:ln>
-        </p:spPr>
-        <p:txBody>
-          <a:bodyPr xmlns:a="http://schemas.openxmlformats.org/drawingml/2006/main" anchor="ctr">
-            <a:noAutofit/>
-          </a:bodyPr>
-          <a:lstStyle xmlns:a="http://schemas.openxmlformats.org/drawingml/2006/main"/>
-          <a:p xmlns:a="http://schemas.openxmlformats.org/drawingml/2006/main">
-            <a:pPr>
-              <a:defRPr sz="1725" b="1">
-                <a:solidFill>
-                  <a:srgbClr val="155A81"/>
-                </a:solidFill>
-                <a:latin typeface="Arial"/>
-                <a:ea typeface="Arial"/>
-                <a:cs typeface="Arial"/>
-              </a:defRPr>
-            </a:pPr>
-            <a:r>
-              <a:rPr sz="1725" b="1">
-                <a:solidFill>
-                  <a:srgbClr val="155A81"/>
-                </a:solidFill>
-                <a:latin typeface="Arial"/>
-                <a:ea typeface="Arial"/>
-                <a:cs typeface="Arial"/>
-              </a:rPr>
-              <a:t>OPPORTUNITÉS</a:t>
-            </a:r>
-          </a:p>
-        </p:txBody>
-      </p:sp>
-      <p:sp>
-        <p:nvSpPr>
-          <p:cNvPr id="13" name="">
-            <a:extLst xmlns:a="http://schemas.openxmlformats.org/drawingml/2006/main">
-              <a:ext uri="{FF2B5EF4-FFF2-40B4-BE49-F238E27FC236}">
-                <a16:creationId xmlns:a16="http://schemas.microsoft.com/office/drawing/2014/main" id="{55760CDF-4A76-4A40-AB9E-F086C0EA7DD3}"/>
-              </a:ext>
-            </a:extLst>
-          </p:cNvPr>
-          <p:cNvSpPr>
-            <a:spLocks xmlns:a="http://schemas.openxmlformats.org/drawingml/2006/main" noGrp="1"/>
-          </p:cNvSpPr>
-          <p:nvPr/>
-        </p:nvSpPr>
-        <p:spPr>
-          <a:xfrm xmlns:a="http://schemas.openxmlformats.org/drawingml/2006/main">
-            <a:off x="819150" y="4572000"/>
-            <a:ext cx="4905375" cy="552450"/>
-          </a:xfrm>
-          <a:prstGeom xmlns:a="http://schemas.openxmlformats.org/drawingml/2006/main" prst="rect">
-            <a:avLst/>
-          </a:prstGeom>
-          <a:noFill xmlns:a="http://schemas.openxmlformats.org/drawingml/2006/main"/>
-          <a:ln xmlns:a="http://schemas.openxmlformats.org/drawingml/2006/main" w="0">
-            <a:noFill/>
-          </a:ln>
-        </p:spPr>
-        <p:txBody>
-          <a:bodyPr xmlns:a="http://schemas.openxmlformats.org/drawingml/2006/main" anchor="ctr">
-            <a:noAutofit/>
-          </a:bodyPr>
-          <a:lstStyle xmlns:a="http://schemas.openxmlformats.org/drawingml/2006/main"/>
-          <a:p xmlns:a="http://schemas.openxmlformats.org/drawingml/2006/main">
-            <a:pPr>
-              <a:defRPr sz="1463" b="0">
-                <a:solidFill>
-                  <a:srgbClr val="142637"/>
-                </a:solidFill>
-                <a:latin typeface="Arial"/>
-                <a:ea typeface="Arial"/>
-                <a:cs typeface="Arial"/>
-              </a:defRPr>
-            </a:pPr>
-            <a:r>
-              <a:rPr sz="1463" b="0">
-                <a:solidFill>
-                  <a:srgbClr val="142637"/>
-                </a:solidFill>
-                <a:latin typeface="Arial"/>
-                <a:ea typeface="Arial"/>
-                <a:cs typeface="Arial"/>
-              </a:rPr>
-              <a:t>• Données fournies avec autorisation pour confirmer les irritants.</a:t>
-            </a:r>
-          </a:p>
-        </p:txBody>
-      </p:sp>
-      <p:sp>
-        <p:nvSpPr>
-          <p:cNvPr id="14" name="">
-            <a:extLst xmlns:a="http://schemas.openxmlformats.org/drawingml/2006/main">
-              <a:ext uri="{FF2B5EF4-FFF2-40B4-BE49-F238E27FC236}">
-                <a16:creationId xmlns:a16="http://schemas.microsoft.com/office/drawing/2014/main" id="{A81F2052-4EB2-4C08-BE18-829B207B5609}"/>
-              </a:ext>
-            </a:extLst>
-          </p:cNvPr>
-          <p:cNvSpPr>
-            <a:spLocks xmlns:a="http://schemas.openxmlformats.org/drawingml/2006/main" noGrp="1"/>
-          </p:cNvSpPr>
-          <p:nvPr/>
-        </p:nvSpPr>
-        <p:spPr>
-          <a:xfrm xmlns:a="http://schemas.openxmlformats.org/drawingml/2006/main">
-            <a:off x="819150" y="5229225"/>
-            <a:ext cx="4905375" cy="685800"/>
-          </a:xfrm>
-          <a:prstGeom xmlns:a="http://schemas.openxmlformats.org/drawingml/2006/main" prst="rect">
-            <a:avLst/>
-          </a:prstGeom>
-          <a:noFill xmlns:a="http://schemas.openxmlformats.org/drawingml/2006/main"/>
-          <a:ln xmlns:a="http://schemas.openxmlformats.org/drawingml/2006/main" w="0">
-            <a:noFill/>
-          </a:ln>
-        </p:spPr>
-        <p:txBody>
-          <a:bodyPr xmlns:a="http://schemas.openxmlformats.org/drawingml/2006/main" anchor="ctr">
-            <a:noAutofit/>
-          </a:bodyPr>
-          <a:lstStyle xmlns:a="http://schemas.openxmlformats.org/drawingml/2006/main"/>
-          <a:p xmlns:a="http://schemas.openxmlformats.org/drawingml/2006/main">
-            <a:pPr>
-              <a:defRPr sz="1463" b="0">
-                <a:solidFill>
-                  <a:srgbClr val="142637"/>
-                </a:solidFill>
-                <a:latin typeface="Arial"/>
-                <a:ea typeface="Arial"/>
-                <a:cs typeface="Arial"/>
-              </a:defRPr>
-            </a:pPr>
-            <a:r>
-              <a:rPr sz="1463" b="0">
-                <a:solidFill>
-                  <a:srgbClr val="142637"/>
-                </a:solidFill>
-                <a:latin typeface="Arial"/>
-                <a:ea typeface="Arial"/>
-                <a:cs typeface="Arial"/>
-              </a:rPr>
-              <a:t>• Moins de reprises de livraison possibles : bénéfice RSE hypothétique, non mesuré.</a:t>
-            </a:r>
-          </a:p>
-        </p:txBody>
-      </p:sp>
-      <p:sp>
-        <p:nvSpPr>
-          <p:cNvPr id="15" name="">
-            <a:extLst xmlns:a="http://schemas.openxmlformats.org/drawingml/2006/main">
-              <a:ext uri="{FF2B5EF4-FFF2-40B4-BE49-F238E27FC236}">
-                <a16:creationId xmlns:a16="http://schemas.microsoft.com/office/drawing/2014/main" id="{389CEE04-B322-4816-B3C1-3E4B842B98A7}"/>
-              </a:ext>
-            </a:extLst>
-          </p:cNvPr>
-          <p:cNvSpPr>
-            <a:spLocks xmlns:a="http://schemas.openxmlformats.org/drawingml/2006/main" noGrp="1"/>
-          </p:cNvSpPr>
-          <p:nvPr/>
-        </p:nvSpPr>
-        <p:spPr>
-          <a:xfrm xmlns:a="http://schemas.openxmlformats.org/drawingml/2006/main">
-            <a:off x="6191250" y="3924300"/>
-            <a:ext cx="5391150" cy="2228850"/>
-          </a:xfrm>
-          <a:prstGeom xmlns:a="http://schemas.openxmlformats.org/drawingml/2006/main" prst="rect">
-            <a:avLst/>
-          </a:prstGeom>
-          <a:solidFill xmlns:a="http://schemas.openxmlformats.org/drawingml/2006/main">
-            <a:srgbClr val="F6F3EF"/>
-          </a:solidFill>
-          <a:ln xmlns:a="http://schemas.openxmlformats.org/drawingml/2006/main" w="9525">
-            <a:solidFill>
-              <a:srgbClr val="D8CCBE"/>
-            </a:solidFill>
-          </a:ln>
-        </p:spPr>
-      </p:sp>
-      <p:sp>
-        <p:nvSpPr>
-          <p:cNvPr id="16" name="">
-            <a:extLst xmlns:a="http://schemas.openxmlformats.org/drawingml/2006/main">
-              <a:ext uri="{FF2B5EF4-FFF2-40B4-BE49-F238E27FC236}">
-                <a16:creationId xmlns:a16="http://schemas.microsoft.com/office/drawing/2014/main" id="{2BE9E42A-0959-4DE6-9F48-D6CCE7A5528E}"/>
-              </a:ext>
-            </a:extLst>
-          </p:cNvPr>
-          <p:cNvSpPr>
-            <a:spLocks xmlns:a="http://schemas.openxmlformats.org/drawingml/2006/main" noGrp="1"/>
-          </p:cNvSpPr>
-          <p:nvPr/>
-        </p:nvSpPr>
-        <p:spPr>
-          <a:xfrm xmlns:a="http://schemas.openxmlformats.org/drawingml/2006/main">
-            <a:off x="6419850" y="4095750"/>
-            <a:ext cx="4953000" cy="304800"/>
-          </a:xfrm>
-          <a:prstGeom xmlns:a="http://schemas.openxmlformats.org/drawingml/2006/main" prst="rect">
-            <a:avLst/>
-          </a:prstGeom>
-          <a:noFill xmlns:a="http://schemas.openxmlformats.org/drawingml/2006/main"/>
-          <a:ln xmlns:a="http://schemas.openxmlformats.org/drawingml/2006/main" w="0">
-            <a:noFill/>
-          </a:ln>
-        </p:spPr>
-        <p:txBody>
-          <a:bodyPr xmlns:a="http://schemas.openxmlformats.org/drawingml/2006/main" anchor="ctr">
-            <a:noAutofit/>
-          </a:bodyPr>
-          <a:lstStyle xmlns:a="http://schemas.openxmlformats.org/drawingml/2006/main"/>
-          <a:p xmlns:a="http://schemas.openxmlformats.org/drawingml/2006/main">
-            <a:pPr>
-              <a:defRPr sz="1725" b="1">
-                <a:solidFill>
-                  <a:srgbClr val="155A81"/>
-                </a:solidFill>
-                <a:latin typeface="Arial"/>
-                <a:ea typeface="Arial"/>
-                <a:cs typeface="Arial"/>
-              </a:defRPr>
-            </a:pPr>
-            <a:r>
-              <a:rPr sz="1725" b="1">
-                <a:solidFill>
-                  <a:srgbClr val="155A81"/>
-                </a:solidFill>
-                <a:latin typeface="Arial"/>
-                <a:ea typeface="Arial"/>
-                <a:cs typeface="Arial"/>
-              </a:rPr>
-              <a:t>MENACES</a:t>
-            </a:r>
-          </a:p>
-        </p:txBody>
-      </p:sp>
-      <p:sp>
-        <p:nvSpPr>
-          <p:cNvPr id="17" name="">
-            <a:extLst xmlns:a="http://schemas.openxmlformats.org/drawingml/2006/main">
-              <a:ext uri="{FF2B5EF4-FFF2-40B4-BE49-F238E27FC236}">
-                <a16:creationId xmlns:a16="http://schemas.microsoft.com/office/drawing/2014/main" id="{CC0BCC6B-FB13-449A-B221-39789A2CBDE8}"/>
-              </a:ext>
-            </a:extLst>
-          </p:cNvPr>
-          <p:cNvSpPr>
-            <a:spLocks xmlns:a="http://schemas.openxmlformats.org/drawingml/2006/main" noGrp="1"/>
-          </p:cNvSpPr>
-          <p:nvPr/>
-        </p:nvSpPr>
-        <p:spPr>
-          <a:xfrm xmlns:a="http://schemas.openxmlformats.org/drawingml/2006/main">
-            <a:off x="6419850" y="4572000"/>
-            <a:ext cx="4905375" cy="552450"/>
-          </a:xfrm>
-          <a:prstGeom xmlns:a="http://schemas.openxmlformats.org/drawingml/2006/main" prst="rect">
-            <a:avLst/>
-          </a:prstGeom>
-          <a:noFill xmlns:a="http://schemas.openxmlformats.org/drawingml/2006/main"/>
-          <a:ln xmlns:a="http://schemas.openxmlformats.org/drawingml/2006/main" w="0">
-            <a:noFill/>
-          </a:ln>
-        </p:spPr>
-        <p:txBody>
-          <a:bodyPr xmlns:a="http://schemas.openxmlformats.org/drawingml/2006/main" anchor="ctr">
-            <a:noAutofit/>
-          </a:bodyPr>
-          <a:lstStyle xmlns:a="http://schemas.openxmlformats.org/drawingml/2006/main"/>
-          <a:p xmlns:a="http://schemas.openxmlformats.org/drawingml/2006/main">
-            <a:pPr>
-              <a:defRPr sz="1463" b="0">
-                <a:solidFill>
-                  <a:srgbClr val="142637"/>
-                </a:solidFill>
-                <a:latin typeface="Arial"/>
-                <a:ea typeface="Arial"/>
-                <a:cs typeface="Arial"/>
-              </a:defRPr>
-            </a:pPr>
-            <a:r>
-              <a:rPr sz="1463" b="0">
-                <a:solidFill>
-                  <a:srgbClr val="142637"/>
-                </a:solidFill>
-                <a:latin typeface="Arial"/>
-                <a:ea typeface="Arial"/>
-                <a:cs typeface="Arial"/>
-              </a:rPr>
-              <a:t>• Accès aux plateformes, règles de réutilisation et données personnelles.</a:t>
-            </a:r>
-          </a:p>
-        </p:txBody>
-      </p:sp>
-      <p:sp>
-        <p:nvSpPr>
-          <p:cNvPr id="18" name="">
-            <a:extLst xmlns:a="http://schemas.openxmlformats.org/drawingml/2006/main">
-              <a:ext uri="{FF2B5EF4-FFF2-40B4-BE49-F238E27FC236}">
-                <a16:creationId xmlns:a16="http://schemas.microsoft.com/office/drawing/2014/main" id="{AF6ACC25-C5B9-4A57-A2F6-68E186B3565A}"/>
-              </a:ext>
-            </a:extLst>
-          </p:cNvPr>
-          <p:cNvSpPr>
-            <a:spLocks xmlns:a="http://schemas.openxmlformats.org/drawingml/2006/main" noGrp="1"/>
-          </p:cNvSpPr>
-          <p:nvPr/>
-        </p:nvSpPr>
-        <p:spPr>
-          <a:xfrm xmlns:a="http://schemas.openxmlformats.org/drawingml/2006/main">
-            <a:off x="6419850" y="5229225"/>
-            <a:ext cx="4905375" cy="685800"/>
-          </a:xfrm>
-          <a:prstGeom xmlns:a="http://schemas.openxmlformats.org/drawingml/2006/main" prst="rect">
-            <a:avLst/>
-          </a:prstGeom>
-          <a:noFill xmlns:a="http://schemas.openxmlformats.org/drawingml/2006/main"/>
-          <a:ln xmlns:a="http://schemas.openxmlformats.org/drawingml/2006/main" w="0">
-            <a:noFill/>
-          </a:ln>
-        </p:spPr>
-        <p:txBody>
-          <a:bodyPr xmlns:a="http://schemas.openxmlformats.org/drawingml/2006/main" anchor="ctr">
-            <a:noAutofit/>
-          </a:bodyPr>
-          <a:lstStyle xmlns:a="http://schemas.openxmlformats.org/drawingml/2006/main"/>
-          <a:p xmlns:a="http://schemas.openxmlformats.org/drawingml/2006/main">
-            <a:pPr>
-              <a:defRPr sz="1463" b="0">
-                <a:solidFill>
-                  <a:srgbClr val="142637"/>
-                </a:solidFill>
-                <a:latin typeface="Arial"/>
-                <a:ea typeface="Arial"/>
-                <a:cs typeface="Arial"/>
-              </a:defRPr>
-            </a:pPr>
-            <a:r>
-              <a:rPr sz="1463" b="0">
-                <a:solidFill>
-                  <a:srgbClr val="142637"/>
-                </a:solidFill>
-                <a:latin typeface="Arial"/>
-                <a:ea typeface="Arial"/>
-                <a:cs typeface="Arial"/>
-              </a:rPr>
-              <a:t>• Échantillons biaisés, prédictions imparfaites ; VM scolaire limitée.</a:t>
-            </a:r>
-          </a:p>
-        </p:txBody>
-      </p:sp>
-    </p:spTree>
-    <p:extLst>
-      <p:ext uri="{BB962C8B-B14F-4D97-AF65-F5344CB8AC3E}">
-        <p14:creationId xmlns:p14="http://schemas.microsoft.com/office/powerpoint/2010/main" val="974076186"/>
-      </p:ext>
-    </p:extLst>
-  </p:cSld>
-</p:sld>
+<ns0:sld xmlns:ns0="http://schemas.openxmlformats.org/presentationml/2006/main" xmlns:ns1="http://schemas.openxmlformats.org/drawingml/2006/main" xmlns:ns2="http://schemas.microsoft.com/office/drawing/2014/main" xmlns:ns3="http://schemas.microsoft.com/office/powerpoint/2010/main">
+  <ns0:cSld>
+    <ns0:bg>
+      <ns0:bgPr>
+        <ns1:solidFill>
+          <ns1:srgbClr val="FFFFFF"/>
+        </ns1:solidFill>
+      </ns0:bgPr>
+    </ns0:bg>
+    <ns0:spTree>
+      <ns0:nvGrpSpPr>
+        <ns0:cNvPr id="1" name=""/>
+        <ns0:cNvGrpSpPr/>
+        <ns0:nvPr/>
+      </ns0:nvGrpSpPr>
+      <ns0:grpSpPr>
+        <ns1:xfrm/>
+      </ns0:grpSpPr>
+      <ns0:sp>
+        <ns0:nvSpPr>
+          <ns0:cNvPr id="19" name="">
+            <ns1:extLst>
+              <ns1:ext uri="{FF2B5EF4-FFF2-40B4-BE49-F238E27FC236}">
+                <ns2:creationId id="{192F4900-4145-4DC9-A4A2-F467D3A9281F}"/>
+              </ns1:ext>
+            </ns1:extLst>
+          </ns0:cNvPr>
+          <ns0:cNvSpPr>
+            <ns1:spLocks noGrp="1"/>
+          </ns0:cNvSpPr>
+          <ns0:nvPr/>
+        </ns0:nvSpPr>
+        <ns0:spPr>
+          <ns1:xfrm>
+            <ns1:off x="590550" y="295275"/>
+            <ns1:ext cx="10953750" cy="552450"/>
+          </ns1:xfrm>
+          <ns1:prstGeom prst="rect">
+            <ns1:avLst/>
+          </ns1:prstGeom>
+          <ns1:noFill/>
+          <ns1:ln w="0">
+            <ns1:noFill/>
+          </ns1:ln>
+        </ns0:spPr>
+        <ns0:txBody>
+          <ns1:bodyPr anchor="ctr">
+            <ns1:noAutofit/>
+          </ns1:bodyPr>
+          <ns1:lstStyle/>
+          <ns1:p>
+            <ns1:pPr>
+              <ns1:defRPr sz="3000" b="1">
+                <ns1:solidFill>
+                  <ns1:srgbClr val="142637"/>
+                </ns1:solidFill>
+                <ns1:latin typeface="Arial"/>
+                <ns1:ea typeface="Arial"/>
+                <ns1:cs typeface="Arial"/>
+              </ns1:defRPr>
+            </ns1:pPr>
+            <ns1:r>
+              <ns1:rPr sz="3000" b="1">
+                <ns1:solidFill>
+                  <ns1:srgbClr val="142637"/>
+                </ns1:solidFill>
+                <ns1:latin typeface="Arial"/>
+                <ns1:ea typeface="Arial"/>
+                <ns1:cs typeface="Arial"/>
+              </ns1:rPr>
+              <ns1:t>SWOT du projet Satisfaction Client</ns1:t>
+            </ns1:r>
+          </ns1:p>
+        </ns0:txBody>
+      </ns0:sp>
+      <ns0:sp>
+        <ns0:nvSpPr>
+          <ns0:cNvPr id="2" name="">
+            <ns1:extLst>
+              <ns1:ext uri="{FF2B5EF4-FFF2-40B4-BE49-F238E27FC236}">
+                <ns2:creationId id="{975DC075-AB7F-4535-A51C-FB12E0A04158}"/>
+              </ns1:ext>
+            </ns1:extLst>
+          </ns0:cNvPr>
+          <ns0:cNvSpPr>
+            <ns1:spLocks noGrp="1"/>
+          </ns0:cNvSpPr>
+          <ns0:nvPr/>
+        </ns0:nvSpPr>
+        <ns0:spPr>
+          <ns1:xfrm>
+            <ns1:off x="600075" y="866775"/>
+            <ns1:ext cx="10953750" cy="266700"/>
+          </ns1:xfrm>
+          <ns1:prstGeom prst="rect">
+            <ns1:avLst/>
+          </ns1:prstGeom>
+          <ns1:noFill/>
+          <ns1:ln w="0">
+            <ns1:noFill/>
+          </ns1:ln>
+        </ns0:spPr>
+        <ns0:txBody>
+          <ns1:bodyPr anchor="ctr">
+            <ns1:noAutofit/>
+          </ns1:bodyPr>
+          <ns1:lstStyle/>
+          <ns1:p>
+            <ns1:pPr>
+              <ns1:defRPr sz="1350" b="0">
+                <ns1:solidFill>
+                  <ns1:srgbClr val="536171"/>
+                </ns1:solidFill>
+                <ns1:latin typeface="Arial"/>
+                <ns1:ea typeface="Arial"/>
+                <ns1:cs typeface="Arial"/>
+              </ns1:defRPr>
+            </ns1:pPr>
+            <ns1:r>
+              <ns1:rPr sz="1350" b="0">
+                <ns1:solidFill>
+                  <ns1:srgbClr val="536171"/>
+                </ns1:solidFill>
+                <ns1:latin typeface="Arial"/>
+                <ns1:ea typeface="Arial"/>
+                <ns1:cs typeface="Arial"/>
+              </ns1:rPr>
+              <ns1:t>État mis à jour au 30 septembre 2026  |  Hypothèses et limites de soutenance</ns1:t>
+            </ns1:r>
+          </ns1:p>
+        </ns0:txBody>
+      </ns0:sp>
+      <ns0:sp>
+        <ns0:nvSpPr>
+          <ns0:cNvPr id="3" name="">
+            <ns1:extLst>
+              <ns1:ext uri="{FF2B5EF4-FFF2-40B4-BE49-F238E27FC236}">
+                <ns2:creationId id="{DCE24DC1-D5EA-4FB7-853B-BDC3C2F262D5}"/>
+              </ns1:ext>
+            </ns1:extLst>
+          </ns0:cNvPr>
+          <ns0:cNvSpPr>
+            <ns1:spLocks noGrp="1"/>
+          </ns0:cNvSpPr>
+          <ns0:nvPr/>
+        </ns0:nvSpPr>
+        <ns0:spPr>
+          <ns1:xfrm>
+            <ns1:off x="590550" y="1428750"/>
+            <ns1:ext cx="5391150" cy="2228850"/>
+          </ns1:xfrm>
+          <ns1:prstGeom prst="rect">
+            <ns1:avLst/>
+          </ns1:prstGeom>
+          <ns1:solidFill>
+            <ns1:srgbClr val="EFF5F8"/>
+          </ns1:solidFill>
+          <ns1:ln w="9525">
+            <ns1:solidFill>
+              <ns1:srgbClr val="B4CBD9"/>
+            </ns1:solidFill>
+          </ns1:ln>
+        </ns0:spPr>
+      </ns0:sp>
+      <ns0:sp>
+        <ns0:nvSpPr>
+          <ns0:cNvPr id="4" name="">
+            <ns1:extLst>
+              <ns1:ext uri="{FF2B5EF4-FFF2-40B4-BE49-F238E27FC236}">
+                <ns2:creationId id="{3F1A93D4-4E10-42CE-9E07-E1BF288C0B37}"/>
+              </ns1:ext>
+            </ns1:extLst>
+          </ns0:cNvPr>
+          <ns0:cNvSpPr>
+            <ns1:spLocks noGrp="1"/>
+          </ns0:cNvSpPr>
+          <ns0:nvPr/>
+        </ns0:nvSpPr>
+        <ns0:spPr>
+          <ns1:xfrm>
+            <ns1:off x="819150" y="1600200"/>
+            <ns1:ext cx="4953000" cy="304800"/>
+          </ns1:xfrm>
+          <ns1:prstGeom prst="rect">
+            <ns1:avLst/>
+          </ns1:prstGeom>
+          <ns1:noFill/>
+          <ns1:ln w="0">
+            <ns1:noFill/>
+          </ns1:ln>
+        </ns0:spPr>
+        <ns0:txBody>
+          <ns1:bodyPr anchor="ctr">
+            <ns1:noAutofit/>
+          </ns1:bodyPr>
+          <ns1:lstStyle/>
+          <ns1:p>
+            <ns1:pPr>
+              <ns1:defRPr sz="1725" b="1">
+                <ns1:solidFill>
+                  <ns1:srgbClr val="155A81"/>
+                </ns1:solidFill>
+                <ns1:latin typeface="Arial"/>
+                <ns1:ea typeface="Arial"/>
+                <ns1:cs typeface="Arial"/>
+              </ns1:defRPr>
+            </ns1:pPr>
+            <ns1:r>
+              <ns1:rPr sz="1725" b="1">
+                <ns1:solidFill>
+                  <ns1:srgbClr val="155A81"/>
+                </ns1:solidFill>
+                <ns1:latin typeface="Arial"/>
+                <ns1:ea typeface="Arial"/>
+                <ns1:cs typeface="Arial"/>
+              </ns1:rPr>
+              <ns1:t>FORCES</ns1:t>
+            </ns1:r>
+          </ns1:p>
+        </ns0:txBody>
+      </ns0:sp>
+      <ns0:sp>
+        <ns0:nvSpPr>
+          <ns0:cNvPr id="5" name="">
+            <ns1:extLst>
+              <ns1:ext uri="{FF2B5EF4-FFF2-40B4-BE49-F238E27FC236}">
+                <ns2:creationId id="{16040025-5152-40AD-873D-EB89826778F0}"/>
+              </ns1:ext>
+            </ns1:extLst>
+          </ns0:cNvPr>
+          <ns0:cNvSpPr>
+            <ns1:spLocks noGrp="1"/>
+          </ns0:cNvSpPr>
+          <ns0:nvPr/>
+        </ns0:nvSpPr>
+        <ns0:spPr>
+          <ns1:xfrm>
+            <ns1:off x="819150" y="2076450"/>
+            <ns1:ext cx="4905375" cy="552450"/>
+          </ns1:xfrm>
+          <ns1:prstGeom prst="rect">
+            <ns1:avLst/>
+          </ns1:prstGeom>
+          <ns1:noFill/>
+          <ns1:ln w="0">
+            <ns1:noFill/>
+          </ns1:ln>
+        </ns0:spPr>
+        <ns0:txBody>
+          <ns1:bodyPr anchor="ctr">
+            <ns1:noAutofit/>
+          </ns1:bodyPr>
+          <ns1:lstStyle/>
+          <ns1:p>
+            <ns1:pPr>
+              <ns1:defRPr sz="1463" b="0">
+                <ns1:solidFill>
+                  <ns1:srgbClr val="142637"/>
+                </ns1:solidFill>
+                <ns1:latin typeface="Arial"/>
+                <ns1:ea typeface="Arial"/>
+                <ns1:cs typeface="Arial"/>
+              </ns1:defRPr>
+            </ns1:pPr>
+            <ns1:r>
+              <ns1:rPr sz="1463" b="0">
+                <ns1:solidFill>
+                  <ns1:srgbClr val="142637"/>
+                </ns1:solidFill>
+                <ns1:latin typeface="Arial"/>
+                <ns1:ea typeface="Arial"/>
+                <ns1:cs typeface="Arial"/>
+              </ns1:rPr>
+              <ns1:t>• Import, analyse et tableau de bord ; JWT et rôles.</ns1:t>
+            </ns1:r>
+          </ns1:p>
+        </ns0:txBody>
+      </ns0:sp>
+      <ns0:sp>
+        <ns0:nvSpPr>
+          <ns0:cNvPr id="6" name="">
+            <ns1:extLst>
+              <ns1:ext uri="{FF2B5EF4-FFF2-40B4-BE49-F238E27FC236}">
+                <ns2:creationId id="{144C0C40-8899-463A-9837-56AC8D9CB4EC}"/>
+              </ns1:ext>
+            </ns1:extLst>
+          </ns0:cNvPr>
+          <ns0:cNvSpPr>
+            <ns1:spLocks noGrp="1"/>
+          </ns0:cNvSpPr>
+          <ns0:nvPr/>
+        </ns0:nvSpPr>
+        <ns0:spPr>
+          <ns1:xfrm>
+            <ns1:off x="819150" y="2733675"/>
+            <ns1:ext cx="4905375" cy="685800"/>
+          </ns1:xfrm>
+          <ns1:prstGeom prst="rect">
+            <ns1:avLst/>
+          </ns1:prstGeom>
+          <ns1:noFill/>
+          <ns1:ln w="0">
+            <ns1:noFill/>
+          </ns1:ln>
+        </ns0:spPr>
+        <ns0:txBody>
+          <ns1:bodyPr anchor="ctr">
+            <ns1:noAutofit/>
+          </ns1:bodyPr>
+          <ns1:lstStyle/>
+          <ns1:p>
+            <ns1:pPr>
+              <ns1:defRPr sz="1463" b="0">
+                <ns1:solidFill>
+                  <ns1:srgbClr val="142637"/>
+                </ns1:solidFill>
+                <ns1:latin typeface="Arial"/>
+                <ns1:ea typeface="Arial"/>
+                <ns1:cs typeface="Arial"/>
+              </ns1:defRPr>
+            </ns1:pPr>
+            <ns1:r>
+              <ns1:rPr sz="1463" b="0">
+                <ns1:solidFill>
+                  <ns1:srgbClr val="142637"/>
+                </ns1:solidFill>
+                <ns1:latin typeface="Arial"/>
+                <ns1:ea typeface="Arial"/>
+                <ns1:cs typeface="Arial"/>
+              </ns1:rPr>
+              <ns1:t>• ML dédupliqué ; v53 documenté et identifiable dans MLflow conservé. Déploiement et supervision de test.</ns1:t>
+            </ns1:r>
+          </ns1:p>
+        </ns0:txBody>
+      </ns0:sp>
+      <ns0:sp>
+        <ns0:nvSpPr>
+          <ns0:cNvPr id="7" name="">
+            <ns1:extLst>
+              <ns1:ext uri="{FF2B5EF4-FFF2-40B4-BE49-F238E27FC236}">
+                <ns2:creationId id="{96FA16C6-7686-4F2E-8C57-832F7A73251C}"/>
+              </ns1:ext>
+            </ns1:extLst>
+          </ns0:cNvPr>
+          <ns0:cNvSpPr>
+            <ns1:spLocks noGrp="1"/>
+          </ns0:cNvSpPr>
+          <ns0:nvPr/>
+        </ns0:nvSpPr>
+        <ns0:spPr>
+          <ns1:xfrm>
+            <ns1:off x="6191250" y="1428750"/>
+            <ns1:ext cx="5391150" cy="2228850"/>
+          </ns1:xfrm>
+          <ns1:prstGeom prst="rect">
+            <ns1:avLst/>
+          </ns1:prstGeom>
+          <ns1:solidFill>
+            <ns1:srgbClr val="F8F2F0"/>
+          </ns1:solidFill>
+          <ns1:ln w="9525">
+            <ns1:solidFill>
+              <ns1:srgbClr val="D9C4BE"/>
+            </ns1:solidFill>
+          </ns1:ln>
+        </ns0:spPr>
+      </ns0:sp>
+      <ns0:sp>
+        <ns0:nvSpPr>
+          <ns0:cNvPr id="8" name="">
+            <ns1:extLst>
+              <ns1:ext uri="{FF2B5EF4-FFF2-40B4-BE49-F238E27FC236}">
+                <ns2:creationId id="{D5230432-5A08-4570-98BB-B5E57C7CED4A}"/>
+              </ns1:ext>
+            </ns1:extLst>
+          </ns0:cNvPr>
+          <ns0:cNvSpPr>
+            <ns1:spLocks noGrp="1"/>
+          </ns0:cNvSpPr>
+          <ns0:nvPr/>
+        </ns0:nvSpPr>
+        <ns0:spPr>
+          <ns1:xfrm>
+            <ns1:off x="6419850" y="1600200"/>
+            <ns1:ext cx="4953000" cy="304800"/>
+          </ns1:xfrm>
+          <ns1:prstGeom prst="rect">
+            <ns1:avLst/>
+          </ns1:prstGeom>
+          <ns1:noFill/>
+          <ns1:ln w="0">
+            <ns1:noFill/>
+          </ns1:ln>
+        </ns0:spPr>
+        <ns0:txBody>
+          <ns1:bodyPr anchor="ctr">
+            <ns1:noAutofit/>
+          </ns1:bodyPr>
+          <ns1:lstStyle/>
+          <ns1:p>
+            <ns1:pPr>
+              <ns1:defRPr sz="1725" b="1">
+                <ns1:solidFill>
+                  <ns1:srgbClr val="155A81"/>
+                </ns1:solidFill>
+                <ns1:latin typeface="Arial"/>
+                <ns1:ea typeface="Arial"/>
+                <ns1:cs typeface="Arial"/>
+              </ns1:defRPr>
+            </ns1:pPr>
+            <ns1:r>
+              <ns1:rPr sz="1725" b="1">
+                <ns1:solidFill>
+                  <ns1:srgbClr val="155A81"/>
+                </ns1:solidFill>
+                <ns1:latin typeface="Arial"/>
+                <ns1:ea typeface="Arial"/>
+                <ns1:cs typeface="Arial"/>
+              </ns1:rPr>
+              <ns1:t>FAIBLESSES</ns1:t>
+            </ns1:r>
+          </ns1:p>
+        </ns0:txBody>
+      </ns0:sp>
+      <ns0:sp>
+        <ns0:nvSpPr>
+          <ns0:cNvPr id="9" name="">
+            <ns1:extLst>
+              <ns1:ext uri="{FF2B5EF4-FFF2-40B4-BE49-F238E27FC236}">
+                <ns2:creationId id="{69926761-B265-4B47-A302-5545BA0B28F0}"/>
+              </ns1:ext>
+            </ns1:extLst>
+          </ns0:cNvPr>
+          <ns0:cNvSpPr>
+            <ns1:spLocks noGrp="1"/>
+          </ns0:cNvSpPr>
+          <ns0:nvPr/>
+        </ns0:nvSpPr>
+        <ns0:spPr>
+          <ns1:xfrm>
+            <ns1:off x="6419850" y="2076450"/>
+            <ns1:ext cx="4905375" cy="552450"/>
+          </ns1:xfrm>
+          <ns1:prstGeom prst="rect">
+            <ns1:avLst/>
+          </ns1:prstGeom>
+          <ns1:noFill/>
+          <ns1:ln w="0">
+            <ns1:noFill/>
+          </ns1:ln>
+        </ns0:spPr>
+        <ns0:txBody>
+          <ns1:bodyPr anchor="ctr">
+            <ns1:noAutofit/>
+          </ns1:bodyPr>
+          <ns1:lstStyle/>
+          <ns1:p>
+            <ns1:pPr>
+              <ns1:defRPr sz="1463" b="0">
+                <ns1:solidFill>
+                  <ns1:srgbClr val="142637"/>
+                </ns1:solidFill>
+                <ns1:latin typeface="Arial"/>
+                <ns1:ea typeface="Arial"/>
+                <ns1:cs typeface="Arial"/>
+              </ns1:defRPr>
+            </ns1:pPr>
+            <ns1:r>
+              <ns1:rPr sz="1463" b="0">
+                <ns1:solidFill>
+                  <ns1:srgbClr val="142637"/>
+                </ns1:solidFill>
+                <ns1:latin typeface="Arial"/>
+                <ns1:ea typeface="Arial"/>
+                <ns1:cs typeface="Arial"/>
+              </ns1:rPr>
+              <ns1:t>• Droits de réutilisation et portée temporelle de la collecte Vapoter à cadrer.</ns1:t>
+            </ns1:r>
+          </ns1:p>
+        </ns0:txBody>
+      </ns0:sp>
+      <ns0:sp>
+        <ns0:nvSpPr>
+          <ns0:cNvPr id="10" name="">
+            <ns1:extLst>
+              <ns1:ext uri="{FF2B5EF4-FFF2-40B4-BE49-F238E27FC236}">
+                <ns2:creationId id="{C22A82BA-5E27-469D-A0E4-1BC46926196D}"/>
+              </ns1:ext>
+            </ns1:extLst>
+          </ns0:cNvPr>
+          <ns0:cNvSpPr>
+            <ns1:spLocks noGrp="1"/>
+          </ns0:cNvSpPr>
+          <ns0:nvPr/>
+        </ns0:nvSpPr>
+        <ns0:spPr>
+          <ns1:xfrm>
+            <ns1:off x="6419850" y="2733675"/>
+            <ns1:ext cx="4905375" cy="685800"/>
+          </ns1:xfrm>
+          <ns1:prstGeom prst="rect">
+            <ns1:avLst/>
+          </ns1:prstGeom>
+          <ns1:noFill/>
+          <ns1:ln w="0">
+            <ns1:noFill/>
+          </ns1:ln>
+        </ns0:spPr>
+        <ns0:txBody>
+          <ns1:bodyPr anchor="ctr">
+            <ns1:noAutofit/>
+          </ns1:bodyPr>
+          <ns1:lstStyle/>
+          <ns1:p>
+            <ns1:pPr>
+              <ns1:defRPr sz="1463" b="0">
+                <ns1:solidFill>
+                  <ns1:srgbClr val="142637"/>
+                </ns1:solidFill>
+                <ns1:latin typeface="Arial"/>
+                <ns1:ea typeface="Arial"/>
+                <ns1:cs typeface="Arial"/>
+              </ns1:defRPr>
+            </ns1:pPr>
+            <ns1:r>
+              <ns1:rPr sz="1463" b="0">
+                <ns1:solidFill>
+                  <ns1:srgbClr val="142637"/>
+                </ns1:solidFill>
+                <ns1:latin typeface="Arial"/>
+                <ns1:ea typeface="Arial"/>
+                <ns1:cs typeface="Arial"/>
+              </ns1:rPr>
+              <ns1:t>• Corpus et classe Neutre limités ; accessibilité et RGPD non audités de bout en bout.</ns1:t>
+            </ns1:r>
+          </ns1:p>
+        </ns0:txBody>
+      </ns0:sp>
+      <ns0:sp>
+        <ns0:nvSpPr>
+          <ns0:cNvPr id="11" name="">
+            <ns1:extLst>
+              <ns1:ext uri="{FF2B5EF4-FFF2-40B4-BE49-F238E27FC236}">
+                <ns2:creationId id="{FB67ACA6-9768-4490-9FEA-2A3D543FED4D}"/>
+              </ns1:ext>
+            </ns1:extLst>
+          </ns0:cNvPr>
+          <ns0:cNvSpPr>
+            <ns1:spLocks noGrp="1"/>
+          </ns0:cNvSpPr>
+          <ns0:nvPr/>
+        </ns0:nvSpPr>
+        <ns0:spPr>
+          <ns1:xfrm>
+            <ns1:off x="590550" y="3924300"/>
+            <ns1:ext cx="5391150" cy="2228850"/>
+          </ns1:xfrm>
+          <ns1:prstGeom prst="rect">
+            <ns1:avLst/>
+          </ns1:prstGeom>
+          <ns1:solidFill>
+            <ns1:srgbClr val="F1F5F0"/>
+          </ns1:solidFill>
+          <ns1:ln w="9525">
+            <ns1:solidFill>
+              <ns1:srgbClr val="C2D3BD"/>
+            </ns1:solidFill>
+          </ns1:ln>
+        </ns0:spPr>
+      </ns0:sp>
+      <ns0:sp>
+        <ns0:nvSpPr>
+          <ns0:cNvPr id="12" name="">
+            <ns1:extLst>
+              <ns1:ext uri="{FF2B5EF4-FFF2-40B4-BE49-F238E27FC236}">
+                <ns2:creationId id="{1850CD80-5E2B-4F5E-81E4-CE1FD538BADF}"/>
+              </ns1:ext>
+            </ns1:extLst>
+          </ns0:cNvPr>
+          <ns0:cNvSpPr>
+            <ns1:spLocks noGrp="1"/>
+          </ns0:cNvSpPr>
+          <ns0:nvPr/>
+        </ns0:nvSpPr>
+        <ns0:spPr>
+          <ns1:xfrm>
+            <ns1:off x="819150" y="4095750"/>
+            <ns1:ext cx="4953000" cy="304800"/>
+          </ns1:xfrm>
+          <ns1:prstGeom prst="rect">
+            <ns1:avLst/>
+          </ns1:prstGeom>
+          <ns1:noFill/>
+          <ns1:ln w="0">
+            <ns1:noFill/>
+          </ns1:ln>
+        </ns0:spPr>
+        <ns0:txBody>
+          <ns1:bodyPr anchor="ctr">
+            <ns1:noAutofit/>
+          </ns1:bodyPr>
+          <ns1:lstStyle/>
+          <ns1:p>
+            <ns1:pPr>
+              <ns1:defRPr sz="1725" b="1">
+                <ns1:solidFill>
+                  <ns1:srgbClr val="155A81"/>
+                </ns1:solidFill>
+                <ns1:latin typeface="Arial"/>
+                <ns1:ea typeface="Arial"/>
+                <ns1:cs typeface="Arial"/>
+              </ns1:defRPr>
+            </ns1:pPr>
+            <ns1:r>
+              <ns1:rPr sz="1725" b="1">
+                <ns1:solidFill>
+                  <ns1:srgbClr val="155A81"/>
+                </ns1:solidFill>
+                <ns1:latin typeface="Arial"/>
+                <ns1:ea typeface="Arial"/>
+                <ns1:cs typeface="Arial"/>
+              </ns1:rPr>
+              <ns1:t>OPPORTUNITÉS</ns1:t>
+            </ns1:r>
+          </ns1:p>
+        </ns0:txBody>
+      </ns0:sp>
+      <ns0:sp>
+        <ns0:nvSpPr>
+          <ns0:cNvPr id="13" name="">
+            <ns1:extLst>
+              <ns1:ext uri="{FF2B5EF4-FFF2-40B4-BE49-F238E27FC236}">
+                <ns2:creationId id="{55760CDF-4A76-4A40-AB9E-F086C0EA7DD3}"/>
+              </ns1:ext>
+            </ns1:extLst>
+          </ns0:cNvPr>
+          <ns0:cNvSpPr>
+            <ns1:spLocks noGrp="1"/>
+          </ns0:cNvSpPr>
+          <ns0:nvPr/>
+        </ns0:nvSpPr>
+        <ns0:spPr>
+          <ns1:xfrm>
+            <ns1:off x="819150" y="4572000"/>
+            <ns1:ext cx="4905375" cy="552450"/>
+          </ns1:xfrm>
+          <ns1:prstGeom prst="rect">
+            <ns1:avLst/>
+          </ns1:prstGeom>
+          <ns1:noFill/>
+          <ns1:ln w="0">
+            <ns1:noFill/>
+          </ns1:ln>
+        </ns0:spPr>
+        <ns0:txBody>
+          <ns1:bodyPr anchor="ctr">
+            <ns1:noAutofit/>
+          </ns1:bodyPr>
+          <ns1:lstStyle/>
+          <ns1:p>
+            <ns1:pPr>
+              <ns1:defRPr sz="1463" b="0">
+                <ns1:solidFill>
+                  <ns1:srgbClr val="142637"/>
+                </ns1:solidFill>
+                <ns1:latin typeface="Arial"/>
+                <ns1:ea typeface="Arial"/>
+                <ns1:cs typeface="Arial"/>
+              </ns1:defRPr>
+            </ns1:pPr>
+            <ns1:r>
+              <ns1:rPr sz="1463" b="0">
+                <ns1:solidFill>
+                  <ns1:srgbClr val="142637"/>
+                </ns1:solidFill>
+                <ns1:latin typeface="Arial"/>
+                <ns1:ea typeface="Arial"/>
+                <ns1:cs typeface="Arial"/>
+              </ns1:rPr>
+              <ns1:t>• Données fournies avec autorisation pour confirmer les irritants.</ns1:t>
+            </ns1:r>
+          </ns1:p>
+        </ns0:txBody>
+      </ns0:sp>
+      <ns0:sp>
+        <ns0:nvSpPr>
+          <ns0:cNvPr id="14" name="">
+            <ns1:extLst>
+              <ns1:ext uri="{FF2B5EF4-FFF2-40B4-BE49-F238E27FC236}">
+                <ns2:creationId id="{A81F2052-4EB2-4C08-BE18-829B207B5609}"/>
+              </ns1:ext>
+            </ns1:extLst>
+          </ns0:cNvPr>
+          <ns0:cNvSpPr>
+            <ns1:spLocks noGrp="1"/>
+          </ns0:cNvSpPr>
+          <ns0:nvPr/>
+        </ns0:nvSpPr>
+        <ns0:spPr>
+          <ns1:xfrm>
+            <ns1:off x="819150" y="5229225"/>
+            <ns1:ext cx="4905375" cy="685800"/>
+          </ns1:xfrm>
+          <ns1:prstGeom prst="rect">
+            <ns1:avLst/>
+          </ns1:prstGeom>
+          <ns1:noFill/>
+          <ns1:ln w="0">
+            <ns1:noFill/>
+          </ns1:ln>
+        </ns0:spPr>
+        <ns0:txBody>
+          <ns1:bodyPr anchor="ctr">
+            <ns1:noAutofit/>
+          </ns1:bodyPr>
+          <ns1:lstStyle/>
+          <ns1:p>
+            <ns1:pPr>
+              <ns1:defRPr sz="1463" b="0">
+                <ns1:solidFill>
+                  <ns1:srgbClr val="142637"/>
+                </ns1:solidFill>
+                <ns1:latin typeface="Arial"/>
+                <ns1:ea typeface="Arial"/>
+                <ns1:cs typeface="Arial"/>
+              </ns1:defRPr>
+            </ns1:pPr>
+            <ns1:r>
+              <ns1:rPr sz="1463" b="0">
+                <ns1:solidFill>
+                  <ns1:srgbClr val="142637"/>
+                </ns1:solidFill>
+                <ns1:latin typeface="Arial"/>
+                <ns1:ea typeface="Arial"/>
+                <ns1:cs typeface="Arial"/>
+              </ns1:rPr>
+              <ns1:t>• Moins de reprises de livraison possibles : bénéfice RSE hypothétique, non mesuré.</ns1:t>
+            </ns1:r>
+          </ns1:p>
+        </ns0:txBody>
+      </ns0:sp>
+      <ns0:sp>
+        <ns0:nvSpPr>
+          <ns0:cNvPr id="15" name="">
+            <ns1:extLst>
+              <ns1:ext uri="{FF2B5EF4-FFF2-40B4-BE49-F238E27FC236}">
+                <ns2:creationId id="{389CEE04-B322-4816-B3C1-3E4B842B98A7}"/>
+              </ns1:ext>
+            </ns1:extLst>
+          </ns0:cNvPr>
+          <ns0:cNvSpPr>
+            <ns1:spLocks noGrp="1"/>
+          </ns0:cNvSpPr>
+          <ns0:nvPr/>
+        </ns0:nvSpPr>
+        <ns0:spPr>
+          <ns1:xfrm>
+            <ns1:off x="6191250" y="3924300"/>
+            <ns1:ext cx="5391150" cy="2228850"/>
+          </ns1:xfrm>
+          <ns1:prstGeom prst="rect">
+            <ns1:avLst/>
+          </ns1:prstGeom>
+          <ns1:solidFill>
+            <ns1:srgbClr val="F6F3EF"/>
+          </ns1:solidFill>
+          <ns1:ln w="9525">
+            <ns1:solidFill>
+              <ns1:srgbClr val="D8CCBE"/>
+            </ns1:solidFill>
+          </ns1:ln>
+        </ns0:spPr>
+      </ns0:sp>
+      <ns0:sp>
+        <ns0:nvSpPr>
+          <ns0:cNvPr id="16" name="">
+            <ns1:extLst>
+              <ns1:ext uri="{FF2B5EF4-FFF2-40B4-BE49-F238E27FC236}">
+                <ns2:creationId id="{2BE9E42A-0959-4DE6-9F48-D6CCE7A5528E}"/>
+              </ns1:ext>
+            </ns1:extLst>
+          </ns0:cNvPr>
+          <ns0:cNvSpPr>
+            <ns1:spLocks noGrp="1"/>
+          </ns0:cNvSpPr>
+          <ns0:nvPr/>
+        </ns0:nvSpPr>
+        <ns0:spPr>
+          <ns1:xfrm>
+            <ns1:off x="6419850" y="4095750"/>
+            <ns1:ext cx="4953000" cy="304800"/>
+          </ns1:xfrm>
+          <ns1:prstGeom prst="rect">
+            <ns1:avLst/>
+          </ns1:prstGeom>
+          <ns1:noFill/>
+          <ns1:ln w="0">
+            <ns1:noFill/>
+          </ns1:ln>
+        </ns0:spPr>
+        <ns0:txBody>
+          <ns1:bodyPr anchor="ctr">
+            <ns1:noAutofit/>
+          </ns1:bodyPr>
+          <ns1:lstStyle/>
+          <ns1:p>
+            <ns1:pPr>
+              <ns1:defRPr sz="1725" b="1">
+                <ns1:solidFill>
+                  <ns1:srgbClr val="155A81"/>
+                </ns1:solidFill>
+                <ns1:latin typeface="Arial"/>
+                <ns1:ea typeface="Arial"/>
+                <ns1:cs typeface="Arial"/>
+              </ns1:defRPr>
+            </ns1:pPr>
+            <ns1:r>
+              <ns1:rPr sz="1725" b="1">
+                <ns1:solidFill>
+                  <ns1:srgbClr val="155A81"/>
+                </ns1:solidFill>
+                <ns1:latin typeface="Arial"/>
+                <ns1:ea typeface="Arial"/>
+                <ns1:cs typeface="Arial"/>
+              </ns1:rPr>
+              <ns1:t>MENACES</ns1:t>
+            </ns1:r>
+          </ns1:p>
+        </ns0:txBody>
+      </ns0:sp>
+      <ns0:sp>
+        <ns0:nvSpPr>
+          <ns0:cNvPr id="17" name="">
+            <ns1:extLst>
+              <ns1:ext uri="{FF2B5EF4-FFF2-40B4-BE49-F238E27FC236}">
+                <ns2:creationId id="{CC0BCC6B-FB13-449A-B221-39789A2CBDE8}"/>
+              </ns1:ext>
+            </ns1:extLst>
+          </ns0:cNvPr>
+          <ns0:cNvSpPr>
+            <ns1:spLocks noGrp="1"/>
+          </ns0:cNvSpPr>
+          <ns0:nvPr/>
+        </ns0:nvSpPr>
+        <ns0:spPr>
+          <ns1:xfrm>
+            <ns1:off x="6419850" y="4572000"/>
+            <ns1:ext cx="4905375" cy="552450"/>
+          </ns1:xfrm>
+          <ns1:prstGeom prst="rect">
+            <ns1:avLst/>
+          </ns1:prstGeom>
+          <ns1:noFill/>
+          <ns1:ln w="0">
+            <ns1:noFill/>
+          </ns1:ln>
+        </ns0:spPr>
+        <ns0:txBody>
+          <ns1:bodyPr anchor="ctr">
+            <ns1:noAutofit/>
+          </ns1:bodyPr>
+          <ns1:lstStyle/>
+          <ns1:p>
+            <ns1:pPr>
+              <ns1:defRPr sz="1463" b="0">
+                <ns1:solidFill>
+                  <ns1:srgbClr val="142637"/>
+                </ns1:solidFill>
+                <ns1:latin typeface="Arial"/>
+                <ns1:ea typeface="Arial"/>
+                <ns1:cs typeface="Arial"/>
+              </ns1:defRPr>
+            </ns1:pPr>
+            <ns1:r>
+              <ns1:rPr sz="1463" b="0">
+                <ns1:solidFill>
+                  <ns1:srgbClr val="142637"/>
+                </ns1:solidFill>
+                <ns1:latin typeface="Arial"/>
+                <ns1:ea typeface="Arial"/>
+                <ns1:cs typeface="Arial"/>
+              </ns1:rPr>
+              <ns1:t>• Accès aux plateformes, règles de réutilisation et données personnelles.</ns1:t>
+            </ns1:r>
+          </ns1:p>
+        </ns0:txBody>
+      </ns0:sp>
+      <ns0:sp>
+        <ns0:nvSpPr>
+          <ns0:cNvPr id="18" name="">
+            <ns1:extLst>
+              <ns1:ext uri="{FF2B5EF4-FFF2-40B4-BE49-F238E27FC236}">
+                <ns2:creationId id="{AF6ACC25-C5B9-4A57-A2F6-68E186B3565A}"/>
+              </ns1:ext>
+            </ns1:extLst>
+          </ns0:cNvPr>
+          <ns0:cNvSpPr>
+            <ns1:spLocks noGrp="1"/>
+          </ns0:cNvSpPr>
+          <ns0:nvPr/>
+        </ns0:nvSpPr>
+        <ns0:spPr>
+          <ns1:xfrm>
+            <ns1:off x="6419850" y="5229225"/>
+            <ns1:ext cx="4905375" cy="685800"/>
+          </ns1:xfrm>
+          <ns1:prstGeom prst="rect">
+            <ns1:avLst/>
+          </ns1:prstGeom>
+          <ns1:noFill/>
+          <ns1:ln w="0">
+            <ns1:noFill/>
+          </ns1:ln>
+        </ns0:spPr>
+        <ns0:txBody>
+          <ns1:bodyPr anchor="ctr">
+            <ns1:noAutofit/>
+          </ns1:bodyPr>
+          <ns1:lstStyle/>
+          <ns1:p>
+            <ns1:pPr>
+              <ns1:defRPr sz="1463" b="0">
+                <ns1:solidFill>
+                  <ns1:srgbClr val="142637"/>
+                </ns1:solidFill>
+                <ns1:latin typeface="Arial"/>
+                <ns1:ea typeface="Arial"/>
+                <ns1:cs typeface="Arial"/>
+              </ns1:defRPr>
+            </ns1:pPr>
+            <ns1:r>
+              <ns1:rPr sz="1463" b="0">
+                <ns1:solidFill>
+                  <ns1:srgbClr val="142637"/>
+                </ns1:solidFill>
+                <ns1:latin typeface="Arial"/>
+                <ns1:ea typeface="Arial"/>
+                <ns1:cs typeface="Arial"/>
+              </ns1:rPr>
+              <ns1:t>• Échantillons biaisés, prédictions imparfaites ; VM scolaire limitée.</ns1:t>
+            </ns1:r>
+          </ns1:p>
+        </ns0:txBody>
+      </ns0:sp>
+    </ns0:spTree>
+    <ns0:extLst>
+      <ns0:ext uri="{BB962C8B-B14F-4D97-AF65-F5344CB8AC3E}">
+        <ns3:creationId val="974076186"/>
+      </ns0:ext>
+    </ns0:extLst>
+  </ns0:cSld>
+</ns0:sld>
 </file>
 
 <file path=ppt/theme/theme1.xml><?xml version="1.0" encoding="utf-8"?>
